--- a/docs/presentaciones/01-que-es-ddn.pptx
+++ b/docs/presentaciones/01-que-es-ddn.pptx
@@ -2109,7 +2109,7 @@
                 <a:ea typeface="Calibri" pitchFamily="34" charset="-122"/>
                 <a:cs typeface="Calibri" pitchFamily="34" charset="-120"/>
               </a:rPr>
-              <a:t>Lee docs/capacity-finding.md antes de usar cualquier cifra producida aquí.</a:t>
+              <a:t>Hay que leer docs/capacity-finding.md antes de usar cualquier cifra producida aquí.</a:t>
             </a:r>
             <a:endParaRPr lang="en-US" sz="1800" dirty="0"/>
           </a:p>
@@ -2190,7 +2190,7 @@
                 <a:ea typeface="Calibri" pitchFamily="34" charset="-122"/>
                 <a:cs typeface="Calibri" pitchFamily="34" charset="-120"/>
               </a:rPr>
-              <a:t>La cifra de 12,8 sobres por moto desplegada, frente a los 20–30 que §7.4 espera, no es una medición de capacidad y no debe usarse como tal. En esa ejecución no hay nada que ate: el solver declina por precios, no por tiempo.</a:t>
+              <a:t>La cifra de 12,8 sobres por moto desplegada, frente a los 20–30 que §7.4 espera, no es una medición de capacidad y no debe usarse como tal. En esa ejecución ninguna restricción llega a ser activa: el solver declina por precios, no por tiempo.</a:t>
             </a:r>
             <a:endParaRPr lang="en-US" sz="1300" dirty="0"/>
           </a:p>
@@ -2895,7 +2895,7 @@
                 <a:ea typeface="Calibri" pitchFamily="34" charset="-122"/>
                 <a:cs typeface="Calibri" pitchFamily="34" charset="-120"/>
               </a:rPr>
-              <a:t>En un día punta no todos los sobres listos serán entregables. Elegir cuáles quedan sin asignar es una decisión de primera clase, no un residuo.</a:t>
+              <a:t>En un día pico no todos los sobres listos serán entregables. Elegir cuáles quedan sin asignar es una decisión de primera clase, no un residuo.</a:t>
             </a:r>
             <a:endParaRPr lang="en-US" sz="1400" dirty="0"/>
           </a:p>
@@ -3020,11 +3020,11 @@
         <p:spPr>
           <a:xfrm>
             <a:off x="594360" y="1627632"/>
-            <a:ext cx="3474720" cy="1481328"/>
+            <a:ext cx="3474720" cy="1645920"/>
           </a:xfrm>
           <a:prstGeom prst="roundRect">
             <a:avLst>
-              <a:gd name="adj" fmla="val 4321"/>
+              <a:gd name="adj" fmla="val 3889"/>
             </a:avLst>
           </a:prstGeom>
           <a:solidFill>
@@ -3108,19 +3108,22 @@
         <p:spPr>
           <a:xfrm>
             <a:off x="1399032" y="1901952"/>
-            <a:ext cx="2423160" cy="347472"/>
-          </a:xfrm>
-          <a:prstGeom prst="rect">
-            <a:avLst/>
-          </a:prstGeom>
-          <a:noFill/>
-          <a:ln/>
-        </p:spPr>
-        <p:txBody>
-          <a:bodyPr wrap="square" lIns="0" tIns="0" rIns="0" bIns="0" rtlCol="0" anchor="ctr"/>
-          <a:lstStyle/>
-          <a:p>
-            <a:pPr indent="0" marL="0">
+            <a:ext cx="2423160" cy="274320"/>
+          </a:xfrm>
+          <a:prstGeom prst="rect">
+            <a:avLst/>
+          </a:prstGeom>
+          <a:noFill/>
+          <a:ln/>
+        </p:spPr>
+        <p:txBody>
+          <a:bodyPr wrap="square" lIns="0" tIns="0" rIns="0" bIns="0" rtlCol="0" anchor="ctr"/>
+          <a:lstStyle/>
+          <a:p>
+            <a:pPr indent="0" marL="0">
+              <a:lnSpc>
+                <a:spcPts val="2100"/>
+              </a:lnSpc>
               <a:buNone/>
             </a:pPr>
             <a:r>
@@ -3146,8 +3149,8 @@
         </p:nvSpPr>
         <p:spPr>
           <a:xfrm>
-            <a:off x="868680" y="2414016"/>
-            <a:ext cx="2926080" cy="475488"/>
+            <a:off x="868680" y="2432304"/>
+            <a:ext cx="2926080" cy="676656"/>
           </a:xfrm>
           <a:prstGeom prst="rect">
             <a:avLst/>
@@ -3189,11 +3192,11 @@
         <p:spPr>
           <a:xfrm>
             <a:off x="4343400" y="1627632"/>
-            <a:ext cx="3474720" cy="1481328"/>
+            <a:ext cx="3474720" cy="1645920"/>
           </a:xfrm>
           <a:prstGeom prst="roundRect">
             <a:avLst>
-              <a:gd name="adj" fmla="val 4321"/>
+              <a:gd name="adj" fmla="val 3889"/>
             </a:avLst>
           </a:prstGeom>
           <a:solidFill>
@@ -3277,19 +3280,22 @@
         <p:spPr>
           <a:xfrm>
             <a:off x="5148072" y="1901952"/>
-            <a:ext cx="2423160" cy="347472"/>
-          </a:xfrm>
-          <a:prstGeom prst="rect">
-            <a:avLst/>
-          </a:prstGeom>
-          <a:noFill/>
-          <a:ln/>
-        </p:spPr>
-        <p:txBody>
-          <a:bodyPr wrap="square" lIns="0" tIns="0" rIns="0" bIns="0" rtlCol="0" anchor="ctr"/>
-          <a:lstStyle/>
-          <a:p>
-            <a:pPr indent="0" marL="0">
+            <a:ext cx="2423160" cy="274320"/>
+          </a:xfrm>
+          <a:prstGeom prst="rect">
+            <a:avLst/>
+          </a:prstGeom>
+          <a:noFill/>
+          <a:ln/>
+        </p:spPr>
+        <p:txBody>
+          <a:bodyPr wrap="square" lIns="0" tIns="0" rIns="0" bIns="0" rtlCol="0" anchor="ctr"/>
+          <a:lstStyle/>
+          <a:p>
+            <a:pPr indent="0" marL="0">
+              <a:lnSpc>
+                <a:spcPts val="2100"/>
+              </a:lnSpc>
               <a:buNone/>
             </a:pPr>
             <a:r>
@@ -3315,8 +3321,8 @@
         </p:nvSpPr>
         <p:spPr>
           <a:xfrm>
-            <a:off x="4617720" y="2414016"/>
-            <a:ext cx="2926080" cy="475488"/>
+            <a:off x="4617720" y="2432304"/>
+            <a:ext cx="2926080" cy="676656"/>
           </a:xfrm>
           <a:prstGeom prst="rect">
             <a:avLst/>
@@ -3343,7 +3349,7 @@
                 <a:ea typeface="Calibri" pitchFamily="34" charset="-122"/>
                 <a:cs typeface="Calibri" pitchFamily="34" charset="-120"/>
               </a:rPr>
-              <a:t>La unidad de recogida. Bolsa sellada con manifiesto. Solo por furgoneta.</a:t>
+              <a:t>La unidad de recolección. Bolsa sellada con manifiesto. Solo por furgoneta.</a:t>
             </a:r>
             <a:endParaRPr lang="en-US" sz="1250" dirty="0"/>
           </a:p>
@@ -3358,11 +3364,11 @@
         <p:spPr>
           <a:xfrm>
             <a:off x="8092440" y="1627632"/>
-            <a:ext cx="3474720" cy="1481328"/>
+            <a:ext cx="3474720" cy="1645920"/>
           </a:xfrm>
           <a:prstGeom prst="roundRect">
             <a:avLst>
-              <a:gd name="adj" fmla="val 4321"/>
+              <a:gd name="adj" fmla="val 3889"/>
             </a:avLst>
           </a:prstGeom>
           <a:solidFill>
@@ -3446,19 +3452,22 @@
         <p:spPr>
           <a:xfrm>
             <a:off x="8897112" y="1901952"/>
-            <a:ext cx="2423160" cy="347472"/>
-          </a:xfrm>
-          <a:prstGeom prst="rect">
-            <a:avLst/>
-          </a:prstGeom>
-          <a:noFill/>
-          <a:ln/>
-        </p:spPr>
-        <p:txBody>
-          <a:bodyPr wrap="square" lIns="0" tIns="0" rIns="0" bIns="0" rtlCol="0" anchor="ctr"/>
-          <a:lstStyle/>
-          <a:p>
-            <a:pPr indent="0" marL="0">
+            <a:ext cx="2423160" cy="274320"/>
+          </a:xfrm>
+          <a:prstGeom prst="rect">
+            <a:avLst/>
+          </a:prstGeom>
+          <a:noFill/>
+          <a:ln/>
+        </p:spPr>
+        <p:txBody>
+          <a:bodyPr wrap="square" lIns="0" tIns="0" rIns="0" bIns="0" rtlCol="0" anchor="ctr"/>
+          <a:lstStyle/>
+          <a:p>
+            <a:pPr indent="0" marL="0">
+              <a:lnSpc>
+                <a:spcPts val="2100"/>
+              </a:lnSpc>
               <a:buNone/>
             </a:pPr>
             <a:r>
@@ -3484,8 +3493,8 @@
         </p:nvSpPr>
         <p:spPr>
           <a:xfrm>
-            <a:off x="8366760" y="2414016"/>
-            <a:ext cx="2926080" cy="475488"/>
+            <a:off x="8366760" y="2432304"/>
+            <a:ext cx="2926080" cy="676656"/>
           </a:xfrm>
           <a:prstGeom prst="rect">
             <a:avLst/>
@@ -3526,12 +3535,12 @@
         </p:nvSpPr>
         <p:spPr>
           <a:xfrm>
-            <a:off x="594360" y="3255264"/>
-            <a:ext cx="3474720" cy="1481328"/>
+            <a:off x="594360" y="3438144"/>
+            <a:ext cx="3474720" cy="1645920"/>
           </a:xfrm>
           <a:prstGeom prst="roundRect">
             <a:avLst>
-              <a:gd name="adj" fmla="val 4321"/>
+              <a:gd name="adj" fmla="val 3889"/>
             </a:avLst>
           </a:prstGeom>
           <a:solidFill>
@@ -3555,7 +3564,7 @@
         </p:nvSpPr>
         <p:spPr>
           <a:xfrm>
-            <a:off x="868680" y="3511296"/>
+            <a:off x="868680" y="3694176"/>
             <a:ext cx="420624" cy="420624"/>
           </a:xfrm>
           <a:prstGeom prst="ellipse">
@@ -3575,7 +3584,7 @@
         </p:nvSpPr>
         <p:spPr>
           <a:xfrm>
-            <a:off x="868680" y="3511296"/>
+            <a:off x="868680" y="3694176"/>
             <a:ext cx="420624" cy="420624"/>
           </a:xfrm>
           <a:prstGeom prst="rect">
@@ -3614,20 +3623,23 @@
         </p:nvSpPr>
         <p:spPr>
           <a:xfrm>
-            <a:off x="1399032" y="3529584"/>
-            <a:ext cx="2423160" cy="347472"/>
-          </a:xfrm>
-          <a:prstGeom prst="rect">
-            <a:avLst/>
-          </a:prstGeom>
-          <a:noFill/>
-          <a:ln/>
-        </p:spPr>
-        <p:txBody>
-          <a:bodyPr wrap="square" lIns="0" tIns="0" rIns="0" bIns="0" rtlCol="0" anchor="ctr"/>
-          <a:lstStyle/>
-          <a:p>
-            <a:pPr indent="0" marL="0">
+            <a:off x="1399032" y="3712464"/>
+            <a:ext cx="2423160" cy="274320"/>
+          </a:xfrm>
+          <a:prstGeom prst="rect">
+            <a:avLst/>
+          </a:prstGeom>
+          <a:noFill/>
+          <a:ln/>
+        </p:spPr>
+        <p:txBody>
+          <a:bodyPr wrap="square" lIns="0" tIns="0" rIns="0" bIns="0" rtlCol="0" anchor="ctr"/>
+          <a:lstStyle/>
+          <a:p>
+            <a:pPr indent="0" marL="0">
+              <a:lnSpc>
+                <a:spcPts val="2100"/>
+              </a:lnSpc>
               <a:buNone/>
             </a:pPr>
             <a:r>
@@ -3653,8 +3665,8 @@
         </p:nvSpPr>
         <p:spPr>
           <a:xfrm>
-            <a:off x="868680" y="4041648"/>
-            <a:ext cx="2926080" cy="475488"/>
+            <a:off x="868680" y="4242816"/>
+            <a:ext cx="2926080" cy="676656"/>
           </a:xfrm>
           <a:prstGeom prst="rect">
             <a:avLst/>
@@ -3695,12 +3707,12 @@
         </p:nvSpPr>
         <p:spPr>
           <a:xfrm>
-            <a:off x="4343400" y="3255264"/>
-            <a:ext cx="3474720" cy="1481328"/>
+            <a:off x="4343400" y="3438144"/>
+            <a:ext cx="3474720" cy="1645920"/>
           </a:xfrm>
           <a:prstGeom prst="roundRect">
             <a:avLst>
-              <a:gd name="adj" fmla="val 4321"/>
+              <a:gd name="adj" fmla="val 3889"/>
             </a:avLst>
           </a:prstGeom>
           <a:solidFill>
@@ -3724,7 +3736,7 @@
         </p:nvSpPr>
         <p:spPr>
           <a:xfrm>
-            <a:off x="4617720" y="3511296"/>
+            <a:off x="4617720" y="3694176"/>
             <a:ext cx="420624" cy="420624"/>
           </a:xfrm>
           <a:prstGeom prst="ellipse">
@@ -3744,7 +3756,7 @@
         </p:nvSpPr>
         <p:spPr>
           <a:xfrm>
-            <a:off x="4617720" y="3511296"/>
+            <a:off x="4617720" y="3694176"/>
             <a:ext cx="420624" cy="420624"/>
           </a:xfrm>
           <a:prstGeom prst="rect">
@@ -3783,20 +3795,23 @@
         </p:nvSpPr>
         <p:spPr>
           <a:xfrm>
-            <a:off x="5148072" y="3529584"/>
-            <a:ext cx="2423160" cy="347472"/>
-          </a:xfrm>
-          <a:prstGeom prst="rect">
-            <a:avLst/>
-          </a:prstGeom>
-          <a:noFill/>
-          <a:ln/>
-        </p:spPr>
-        <p:txBody>
-          <a:bodyPr wrap="square" lIns="0" tIns="0" rIns="0" bIns="0" rtlCol="0" anchor="ctr"/>
-          <a:lstStyle/>
-          <a:p>
-            <a:pPr indent="0" marL="0">
+            <a:off x="5148072" y="3712464"/>
+            <a:ext cx="2423160" cy="274320"/>
+          </a:xfrm>
+          <a:prstGeom prst="rect">
+            <a:avLst/>
+          </a:prstGeom>
+          <a:noFill/>
+          <a:ln/>
+        </p:spPr>
+        <p:txBody>
+          <a:bodyPr wrap="square" lIns="0" tIns="0" rIns="0" bIns="0" rtlCol="0" anchor="ctr"/>
+          <a:lstStyle/>
+          <a:p>
+            <a:pPr indent="0" marL="0">
+              <a:lnSpc>
+                <a:spcPts val="2100"/>
+              </a:lnSpc>
               <a:buNone/>
             </a:pPr>
             <a:r>
@@ -3822,8 +3837,8 @@
         </p:nvSpPr>
         <p:spPr>
           <a:xfrm>
-            <a:off x="4617720" y="4041648"/>
-            <a:ext cx="2926080" cy="475488"/>
+            <a:off x="4617720" y="4242816"/>
+            <a:ext cx="2926080" cy="676656"/>
           </a:xfrm>
           <a:prstGeom prst="rect">
             <a:avLst/>
@@ -3850,7 +3865,7 @@
                 <a:ea typeface="Calibri" pitchFamily="34" charset="-122"/>
                 <a:cs typeface="Calibri" pitchFamily="34" charset="-120"/>
               </a:rPr>
-              <a:t>Movimiento de furgoneta entre instalaciones: hub→depósito, transferencias, retornos.</a:t>
+              <a:t>Furgoneta entre instalaciones: hub→depósito, transferencias y retornos.</a:t>
             </a:r>
             <a:endParaRPr lang="en-US" sz="1250" dirty="0"/>
           </a:p>
@@ -3864,12 +3879,12 @@
         </p:nvSpPr>
         <p:spPr>
           <a:xfrm>
-            <a:off x="8092440" y="3255264"/>
-            <a:ext cx="3474720" cy="1481328"/>
+            <a:off x="8092440" y="3438144"/>
+            <a:ext cx="3474720" cy="1645920"/>
           </a:xfrm>
           <a:prstGeom prst="roundRect">
             <a:avLst>
-              <a:gd name="adj" fmla="val 4321"/>
+              <a:gd name="adj" fmla="val 3889"/>
             </a:avLst>
           </a:prstGeom>
           <a:solidFill>
@@ -3893,7 +3908,7 @@
         </p:nvSpPr>
         <p:spPr>
           <a:xfrm>
-            <a:off x="8366760" y="3511296"/>
+            <a:off x="8366760" y="3694176"/>
             <a:ext cx="420624" cy="420624"/>
           </a:xfrm>
           <a:prstGeom prst="ellipse">
@@ -3913,7 +3928,7 @@
         </p:nvSpPr>
         <p:spPr>
           <a:xfrm>
-            <a:off x="8366760" y="3511296"/>
+            <a:off x="8366760" y="3694176"/>
             <a:ext cx="420624" cy="420624"/>
           </a:xfrm>
           <a:prstGeom prst="rect">
@@ -3952,20 +3967,23 @@
         </p:nvSpPr>
         <p:spPr>
           <a:xfrm>
-            <a:off x="8897112" y="3529584"/>
-            <a:ext cx="2423160" cy="347472"/>
-          </a:xfrm>
-          <a:prstGeom prst="rect">
-            <a:avLst/>
-          </a:prstGeom>
-          <a:noFill/>
-          <a:ln/>
-        </p:spPr>
-        <p:txBody>
-          <a:bodyPr wrap="square" lIns="0" tIns="0" rIns="0" bIns="0" rtlCol="0" anchor="ctr"/>
-          <a:lstStyle/>
-          <a:p>
-            <a:pPr indent="0" marL="0">
+            <a:off x="8897112" y="3712464"/>
+            <a:ext cx="2423160" cy="274320"/>
+          </a:xfrm>
+          <a:prstGeom prst="rect">
+            <a:avLst/>
+          </a:prstGeom>
+          <a:noFill/>
+          <a:ln/>
+        </p:spPr>
+        <p:txBody>
+          <a:bodyPr wrap="square" lIns="0" tIns="0" rIns="0" bIns="0" rtlCol="0" anchor="ctr"/>
+          <a:lstStyle/>
+          <a:p>
+            <a:pPr indent="0" marL="0">
+              <a:lnSpc>
+                <a:spcPts val="2100"/>
+              </a:lnSpc>
               <a:buNone/>
             </a:pPr>
             <a:r>
@@ -3991,8 +4009,8 @@
         </p:nvSpPr>
         <p:spPr>
           <a:xfrm>
-            <a:off x="8366760" y="4041648"/>
-            <a:ext cx="2926080" cy="475488"/>
+            <a:off x="8366760" y="4242816"/>
+            <a:ext cx="2926080" cy="676656"/>
           </a:xfrm>
           <a:prstGeom prst="rect">
             <a:avLst/>
@@ -4033,7 +4051,7 @@
         </p:nvSpPr>
         <p:spPr>
           <a:xfrm>
-            <a:off x="594360" y="5047488"/>
+            <a:off x="594360" y="5376672"/>
             <a:ext cx="10972800" cy="502920"/>
           </a:xfrm>
           <a:prstGeom prst="rect">
@@ -4731,12 +4749,12 @@
         </p:nvSpPr>
         <p:spPr>
           <a:xfrm>
-            <a:off x="5989320" y="3090672"/>
-            <a:ext cx="2697480" cy="1371600"/>
+            <a:off x="5989320" y="3017520"/>
+            <a:ext cx="2697480" cy="1627632"/>
           </a:xfrm>
           <a:prstGeom prst="roundRect">
             <a:avLst>
-              <a:gd name="adj" fmla="val 4667"/>
+              <a:gd name="adj" fmla="val 3933"/>
             </a:avLst>
           </a:prstGeom>
           <a:solidFill>
@@ -4760,7 +4778,7 @@
         </p:nvSpPr>
         <p:spPr>
           <a:xfrm>
-            <a:off x="6263640" y="3346704"/>
+            <a:off x="6263640" y="3273552"/>
             <a:ext cx="420624" cy="420624"/>
           </a:xfrm>
           <a:prstGeom prst="ellipse">
@@ -4780,7 +4798,7 @@
         </p:nvSpPr>
         <p:spPr>
           <a:xfrm>
-            <a:off x="6263640" y="3346704"/>
+            <a:off x="6263640" y="3273552"/>
             <a:ext cx="420624" cy="420624"/>
           </a:xfrm>
           <a:prstGeom prst="rect">
@@ -4819,20 +4837,23 @@
         </p:nvSpPr>
         <p:spPr>
           <a:xfrm>
-            <a:off x="6793992" y="3364992"/>
-            <a:ext cx="1645920" cy="347472"/>
-          </a:xfrm>
-          <a:prstGeom prst="rect">
-            <a:avLst/>
-          </a:prstGeom>
-          <a:noFill/>
-          <a:ln/>
-        </p:spPr>
-        <p:txBody>
-          <a:bodyPr wrap="square" lIns="0" tIns="0" rIns="0" bIns="0" rtlCol="0" anchor="ctr"/>
-          <a:lstStyle/>
-          <a:p>
-            <a:pPr indent="0" marL="0">
+            <a:off x="6793992" y="3291840"/>
+            <a:ext cx="1645920" cy="274320"/>
+          </a:xfrm>
+          <a:prstGeom prst="rect">
+            <a:avLst/>
+          </a:prstGeom>
+          <a:noFill/>
+          <a:ln/>
+        </p:spPr>
+        <p:txBody>
+          <a:bodyPr wrap="square" lIns="0" tIns="0" rIns="0" bIns="0" rtlCol="0" anchor="ctr"/>
+          <a:lstStyle/>
+          <a:p>
+            <a:pPr indent="0" marL="0">
+              <a:lnSpc>
+                <a:spcPts val="2100"/>
+              </a:lnSpc>
               <a:buNone/>
             </a:pPr>
             <a:r>
@@ -4858,8 +4879,8 @@
         </p:nvSpPr>
         <p:spPr>
           <a:xfrm>
-            <a:off x="6263640" y="3877056"/>
-            <a:ext cx="2148840" cy="365760"/>
+            <a:off x="6263640" y="3822192"/>
+            <a:ext cx="2148840" cy="658368"/>
           </a:xfrm>
           <a:prstGeom prst="rect">
             <a:avLst/>
@@ -4900,12 +4921,12 @@
         </p:nvSpPr>
         <p:spPr>
           <a:xfrm>
-            <a:off x="8869680" y="3090672"/>
-            <a:ext cx="2697480" cy="1371600"/>
+            <a:off x="8869680" y="3017520"/>
+            <a:ext cx="2697480" cy="1627632"/>
           </a:xfrm>
           <a:prstGeom prst="roundRect">
             <a:avLst>
-              <a:gd name="adj" fmla="val 4667"/>
+              <a:gd name="adj" fmla="val 3933"/>
             </a:avLst>
           </a:prstGeom>
           <a:solidFill>
@@ -4929,7 +4950,7 @@
         </p:nvSpPr>
         <p:spPr>
           <a:xfrm>
-            <a:off x="9144000" y="3346704"/>
+            <a:off x="9144000" y="3273552"/>
             <a:ext cx="420624" cy="420624"/>
           </a:xfrm>
           <a:prstGeom prst="ellipse">
@@ -4949,7 +4970,7 @@
         </p:nvSpPr>
         <p:spPr>
           <a:xfrm>
-            <a:off x="9144000" y="3346704"/>
+            <a:off x="9144000" y="3273552"/>
             <a:ext cx="420624" cy="420624"/>
           </a:xfrm>
           <a:prstGeom prst="rect">
@@ -4988,20 +5009,23 @@
         </p:nvSpPr>
         <p:spPr>
           <a:xfrm>
-            <a:off x="9674352" y="3364992"/>
-            <a:ext cx="1645920" cy="347472"/>
-          </a:xfrm>
-          <a:prstGeom prst="rect">
-            <a:avLst/>
-          </a:prstGeom>
-          <a:noFill/>
-          <a:ln/>
-        </p:spPr>
-        <p:txBody>
-          <a:bodyPr wrap="square" lIns="0" tIns="0" rIns="0" bIns="0" rtlCol="0" anchor="ctr"/>
-          <a:lstStyle/>
-          <a:p>
-            <a:pPr indent="0" marL="0">
+            <a:off x="9674352" y="3291840"/>
+            <a:ext cx="1645920" cy="274320"/>
+          </a:xfrm>
+          <a:prstGeom prst="rect">
+            <a:avLst/>
+          </a:prstGeom>
+          <a:noFill/>
+          <a:ln/>
+        </p:spPr>
+        <p:txBody>
+          <a:bodyPr wrap="square" lIns="0" tIns="0" rIns="0" bIns="0" rtlCol="0" anchor="ctr"/>
+          <a:lstStyle/>
+          <a:p>
+            <a:pPr indent="0" marL="0">
+              <a:lnSpc>
+                <a:spcPts val="2100"/>
+              </a:lnSpc>
               <a:buNone/>
             </a:pPr>
             <a:r>
@@ -5027,8 +5051,8 @@
         </p:nvSpPr>
         <p:spPr>
           <a:xfrm>
-            <a:off x="9144000" y="3877056"/>
-            <a:ext cx="2148840" cy="365760"/>
+            <a:off x="9144000" y="3822192"/>
+            <a:ext cx="2148840" cy="658368"/>
           </a:xfrm>
           <a:prstGeom prst="rect">
             <a:avLst/>
@@ -5249,7 +5273,7 @@
                 <a:ea typeface="Calibri" pitchFamily="34" charset="-122"/>
                 <a:cs typeface="Calibri" pitchFamily="34" charset="-120"/>
               </a:rPr>
-              <a:t>Recogida, consolidación, clasificación y transporte ocurren el día D. La entrega — desde el hub y desde cada depósito — ocurre el día D+1.</a:t>
+              <a:t>Recolección, consolidación, clasificación y transporte ocurren el día D. La entrega — desde el hub y desde cada depósito — ocurre el día D+1.</a:t>
             </a:r>
             <a:endParaRPr lang="en-US" sz="1500" dirty="0"/>
           </a:p>
@@ -5381,7 +5405,7 @@
                 <a:ea typeface="Calibri" pitchFamily="34" charset="-122"/>
                 <a:cs typeface="Calibri" pitchFamily="34" charset="-120"/>
               </a:rPr>
-              <a:t>Recogidas</a:t>
+              <a:t>Recolección</a:t>
             </a:r>
             <a:endParaRPr lang="en-US" sz="1100" dirty="0"/>
           </a:p>
@@ -5725,7 +5749,7 @@
                 <a:ea typeface="Calibri" pitchFamily="34" charset="-122"/>
                 <a:cs typeface="Calibri" pitchFamily="34" charset="-120"/>
               </a:rPr>
-              <a:t>Liberación matinal</a:t>
+              <a:t>Liberación matutina</a:t>
             </a:r>
             <a:endParaRPr lang="en-US" sz="1200" dirty="0"/>
           </a:p>
@@ -5877,7 +5901,7 @@
                 <a:ea typeface="Calibri" pitchFamily="34" charset="-122"/>
                 <a:cs typeface="Calibri" pitchFamily="34" charset="-120"/>
               </a:rPr>
-              <a:t>la furgoneta llega antes de su liberación matinal. Para los depósitos lejanos, eso significa una salida nocturna.</a:t>
+              <a:t>la furgoneta llega antes de su liberación matutina. Para los depósitos lejanos, eso significa una salida nocturna.</a:t>
             </a:r>
             <a:endParaRPr lang="en-US" sz="1350" dirty="0"/>
           </a:p>
@@ -6153,7 +6177,7 @@
                 <a:ea typeface="Cambria" pitchFamily="34" charset="-122"/>
                 <a:cs typeface="Cambria" pitchFamily="34" charset="-120"/>
               </a:rPr>
-              <a:t>Recogidas</a:t>
+              <a:t>Recolección</a:t>
             </a:r>
             <a:endParaRPr lang="en-US" sz="1500" dirty="0"/>
           </a:p>
@@ -6195,7 +6219,7 @@
                 <a:ea typeface="Calibri" pitchFamily="34" charset="-122"/>
                 <a:cs typeface="Calibri" pitchFamily="34" charset="-120"/>
               </a:rPr>
-              <a:t>Dinámicas, durante todo el día. Solo furgonetas, por seguridad. Se reoptimiza con cadencia fija; las paradas visitadas se congelan.</a:t>
+              <a:t>Dinámica, durante todo el día. Solo furgonetas, por seguridad. Se reoptimiza con cadencia fija; las paradas visitadas se congelan.</a:t>
             </a:r>
             <a:endParaRPr lang="en-US" sz="1200" dirty="0"/>
           </a:p>
@@ -6985,7 +7009,7 @@
                 <a:ea typeface="Cambria" pitchFamily="34" charset="-122"/>
                 <a:cs typeface="Cambria" pitchFamily="34" charset="-120"/>
               </a:rPr>
-              <a:t>Run de retorno</a:t>
+              <a:t>Ruta de retorno</a:t>
             </a:r>
             <a:endParaRPr lang="en-US" sz="1500" dirty="0"/>
           </a:p>
@@ -9045,7 +9069,7 @@
                 <a:ea typeface="Calibri" pitchFamily="34" charset="-122"/>
                 <a:cs typeface="Calibri" pitchFamily="34" charset="-120"/>
               </a:rPr>
-              <a:t>El destinatario lo rechaza → run de retorno.</a:t>
+              <a:t>El destinatario lo rechaza → ruta de retorno.</a:t>
             </a:r>
             <a:endParaRPr lang="en-US" sz="1200" dirty="0"/>
           </a:p>
